--- a/docs/pptx/whole/jx-ratio-by-sex.pptx
+++ b/docs/pptx/whole/jx-ratio-by-sex.pptx
@@ -13014,7 +13014,7 @@
           <p:spPr>
             <a:xfrm>
               <a:off x="951755" y="1923572"/>
-              <a:ext cx="4559655" cy="82021"/>
+              <a:ext cx="4946995" cy="82021"/>
             </a:xfrm>
             <a:prstGeom prst="rect">
               <a:avLst/>
@@ -13046,7 +13046,7 @@
                   <a:latin typeface="Helvetica"/>
                   <a:cs typeface="Helvetica"/>
                 </a:rPr>
-                <a:t>Female: N = 515, median = 0.99   |   Male: N = 428, median = 1.00   |   Wilcoxon p = 0.191</a:t>
+                <a:t>Female: N = 515, median = 0.99   |   Male: N = 428, median = 1.00   |   Mann-Whitney U p = 0.191</a:t>
               </a:r>
             </a:p>
           </p:txBody>
